--- a/Presentation_Gestion_Pharmacie.pptx
+++ b/Presentation_Gestion_Pharmacie.pptx
@@ -313,7 +313,7 @@
           <a:p>
             <a:fld id="{5BCAD085-E8A6-8845-BD4E-CB4CCA059FC4}" type="datetimeFigureOut">
               <a:rPr lang="en-US" smtClean="0"/>
-              <a:t>5/29/2026</a:t>
+              <a:t>6/2/2026</a:t>
             </a:fld>
             <a:endParaRPr lang="en-US"/>
           </a:p>
@@ -481,7 +481,7 @@
           <a:p>
             <a:fld id="{5BCAD085-E8A6-8845-BD4E-CB4CCA059FC4}" type="datetimeFigureOut">
               <a:rPr lang="en-US" smtClean="0"/>
-              <a:t>5/29/2026</a:t>
+              <a:t>6/2/2026</a:t>
             </a:fld>
             <a:endParaRPr lang="en-US"/>
           </a:p>
@@ -659,7 +659,7 @@
           <a:p>
             <a:fld id="{5BCAD085-E8A6-8845-BD4E-CB4CCA059FC4}" type="datetimeFigureOut">
               <a:rPr lang="en-US" smtClean="0"/>
-              <a:t>5/29/2026</a:t>
+              <a:t>6/2/2026</a:t>
             </a:fld>
             <a:endParaRPr lang="en-US"/>
           </a:p>
@@ -827,7 +827,7 @@
           <a:p>
             <a:fld id="{5BCAD085-E8A6-8845-BD4E-CB4CCA059FC4}" type="datetimeFigureOut">
               <a:rPr lang="en-US" smtClean="0"/>
-              <a:t>5/29/2026</a:t>
+              <a:t>6/2/2026</a:t>
             </a:fld>
             <a:endParaRPr lang="en-US"/>
           </a:p>
@@ -1072,7 +1072,7 @@
           <a:p>
             <a:fld id="{5BCAD085-E8A6-8845-BD4E-CB4CCA059FC4}" type="datetimeFigureOut">
               <a:rPr lang="en-US" smtClean="0"/>
-              <a:t>5/29/2026</a:t>
+              <a:t>6/2/2026</a:t>
             </a:fld>
             <a:endParaRPr lang="en-US"/>
           </a:p>
@@ -1357,7 +1357,7 @@
           <a:p>
             <a:fld id="{5BCAD085-E8A6-8845-BD4E-CB4CCA059FC4}" type="datetimeFigureOut">
               <a:rPr lang="en-US" smtClean="0"/>
-              <a:t>5/29/2026</a:t>
+              <a:t>6/2/2026</a:t>
             </a:fld>
             <a:endParaRPr lang="en-US"/>
           </a:p>
@@ -1776,7 +1776,7 @@
           <a:p>
             <a:fld id="{5BCAD085-E8A6-8845-BD4E-CB4CCA059FC4}" type="datetimeFigureOut">
               <a:rPr lang="en-US" smtClean="0"/>
-              <a:t>5/29/2026</a:t>
+              <a:t>6/2/2026</a:t>
             </a:fld>
             <a:endParaRPr lang="en-US"/>
           </a:p>
@@ -1893,7 +1893,7 @@
           <a:p>
             <a:fld id="{5BCAD085-E8A6-8845-BD4E-CB4CCA059FC4}" type="datetimeFigureOut">
               <a:rPr lang="en-US" smtClean="0"/>
-              <a:t>5/29/2026</a:t>
+              <a:t>6/2/2026</a:t>
             </a:fld>
             <a:endParaRPr lang="en-US"/>
           </a:p>
@@ -1988,7 +1988,7 @@
           <a:p>
             <a:fld id="{5BCAD085-E8A6-8845-BD4E-CB4CCA059FC4}" type="datetimeFigureOut">
               <a:rPr lang="en-US" smtClean="0"/>
-              <a:t>5/29/2026</a:t>
+              <a:t>6/2/2026</a:t>
             </a:fld>
             <a:endParaRPr lang="en-US"/>
           </a:p>
@@ -2263,7 +2263,7 @@
           <a:p>
             <a:fld id="{5BCAD085-E8A6-8845-BD4E-CB4CCA059FC4}" type="datetimeFigureOut">
               <a:rPr lang="en-US" smtClean="0"/>
-              <a:t>5/29/2026</a:t>
+              <a:t>6/2/2026</a:t>
             </a:fld>
             <a:endParaRPr lang="en-US"/>
           </a:p>
@@ -2515,7 +2515,7 @@
           <a:p>
             <a:fld id="{5BCAD085-E8A6-8845-BD4E-CB4CCA059FC4}" type="datetimeFigureOut">
               <a:rPr lang="en-US" smtClean="0"/>
-              <a:t>5/29/2026</a:t>
+              <a:t>6/2/2026</a:t>
             </a:fld>
             <a:endParaRPr lang="en-US"/>
           </a:p>
@@ -2726,7 +2726,7 @@
           <a:p>
             <a:fld id="{5BCAD085-E8A6-8845-BD4E-CB4CCA059FC4}" type="datetimeFigureOut">
               <a:rPr lang="en-US" smtClean="0"/>
-              <a:t>5/29/2026</a:t>
+              <a:t>6/2/2026</a:t>
             </a:fld>
             <a:endParaRPr lang="en-US"/>
           </a:p>
@@ -3199,40 +3199,6 @@
       </p:sp>
       <p:sp>
         <p:nvSpPr>
-          <p:cNvPr id="4" name="TextBox 3"/>
-          <p:cNvSpPr txBox="1"/>
-          <p:nvPr/>
-        </p:nvSpPr>
-        <p:spPr>
-          <a:xfrm>
-            <a:off x="822960" y="1463040"/>
-            <a:ext cx="1097280" cy="1097280"/>
-          </a:xfrm>
-          <a:prstGeom prst="rect">
-            <a:avLst/>
-          </a:prstGeom>
-          <a:noFill/>
-        </p:spPr>
-        <p:txBody>
-          <a:bodyPr wrap="square">
-            <a:spAutoFit/>
-          </a:bodyPr>
-          <a:lstStyle/>
-          <a:p>
-            <a:pPr algn="ctr"/>
-            <a:r>
-              <a:rPr sz="5200" b="1" i="0">
-                <a:solidFill>
-                  <a:srgbClr val="27AE60"/>
-                </a:solidFill>
-              </a:rPr>
-              <a:t>✚</a:t>
-            </a:r>
-          </a:p>
-        </p:txBody>
-      </p:sp>
-      <p:sp>
-        <p:nvSpPr>
           <p:cNvPr id="5" name="TextBox 4"/>
           <p:cNvSpPr txBox="1"/>
           <p:nvPr/>
@@ -3352,7 +3318,7 @@
         <p:spPr>
           <a:xfrm>
             <a:off x="640080" y="3246120"/>
-            <a:ext cx="6675120" cy="457200"/>
+            <a:ext cx="6675120" cy="307777"/>
           </a:xfrm>
           <a:prstGeom prst="rect">
             <a:avLst/>
@@ -3367,13 +3333,26 @@
           <a:p>
             <a:pPr algn="ctr"/>
             <a:r>
-              <a:rPr sz="1400" b="0" i="0">
+              <a:rPr sz="1400" b="0" i="0" dirty="0">
                 <a:solidFill>
                   <a:srgbClr val="218C74"/>
                 </a:solidFill>
               </a:rPr>
-              <a:t>Laravel 13  •  React  •  Vite  •  Tailwind CSS  •  SQLite</a:t>
-            </a:r>
+              <a:t>Laravel 13  •  React  •  Vite  •  Tailwind CSS  •  </a:t>
+            </a:r>
+            <a:r>
+              <a:rPr lang="en-US" sz="1400" b="0" i="0" dirty="0" err="1">
+                <a:solidFill>
+                  <a:srgbClr val="218C74"/>
+                </a:solidFill>
+              </a:rPr>
+              <a:t>mysql</a:t>
+            </a:r>
+            <a:endParaRPr sz="1400" b="0" i="0" dirty="0">
+              <a:solidFill>
+                <a:srgbClr val="218C74"/>
+              </a:solidFill>
+            </a:endParaRPr>
           </a:p>
         </p:txBody>
       </p:sp>
@@ -10594,7 +10573,7 @@
         <p:spPr>
           <a:xfrm>
             <a:off x="8503920" y="4023360"/>
-            <a:ext cx="3291840" cy="1554480"/>
+            <a:ext cx="3291840" cy="738664"/>
           </a:xfrm>
           <a:prstGeom prst="rect">
             <a:avLst/>
@@ -10609,13 +10588,29 @@
           <a:p>
             <a:pPr algn="ctr"/>
             <a:r>
-              <a:rPr sz="1400" b="1" i="0">
+              <a:rPr sz="1400" b="1" i="0" dirty="0">
                 <a:solidFill>
                   <a:srgbClr val="17202A"/>
                 </a:solidFill>
               </a:rPr>
               <a:t>Base de données
-SQLite
+</a:t>
+            </a:r>
+            <a:r>
+              <a:rPr lang="en-US" sz="1400" b="1" i="0" dirty="0" err="1">
+                <a:solidFill>
+                  <a:srgbClr val="17202A"/>
+                </a:solidFill>
+              </a:rPr>
+              <a:t>mysql</a:t>
+            </a:r>
+            <a:r>
+              <a:rPr sz="1400" b="1" i="0" dirty="0">
+                <a:solidFill>
+                  <a:srgbClr val="17202A"/>
+                </a:solidFill>
+              </a:rPr>
+              <a:t>
 (6 tables)</a:t>
             </a:r>
           </a:p>
